--- a/docs/presentacion_defensa.pptx
+++ b/docs/presentacion_defensa.pptx
@@ -12,10 +12,6 @@
     <p:sldId id="260" r:id="rId11"/>
     <p:sldId id="261" r:id="rId12"/>
     <p:sldId id="262" r:id="rId13"/>
-    <p:sldId id="263" r:id="rId14"/>
-    <p:sldId id="264" r:id="rId15"/>
-    <p:sldId id="265" r:id="rId16"/>
-    <p:sldId id="266" r:id="rId17"/>
   </p:sldIdLst>
   <p:sldSz cx="9144000" cy="6858000" type="screen4x3"/>
   <p:notesSz cx="6858000" cy="9144000"/>
@@ -3107,7 +3103,7 @@
         <p:spPr>
           <a:xfrm>
             <a:off x="548640" y="1051560"/>
-            <a:ext cx="8046720" cy="1645920"/>
+            <a:ext cx="8046720" cy="1737360"/>
           </a:xfrm>
           <a:prstGeom prst="rect">
             <a:avLst/>
@@ -3137,8 +3133,8 @@
         </p:nvSpPr>
         <p:spPr>
           <a:xfrm>
-            <a:off x="548640" y="2926080"/>
-            <a:ext cx="8046720" cy="2926080"/>
+            <a:off x="548640" y="3017520"/>
+            <a:ext cx="8046720" cy="2743200"/>
           </a:xfrm>
           <a:prstGeom prst="rect">
             <a:avLst/>
@@ -3180,235 +3176,6 @@
             </a:pPr>
             <a:r>
               <a:t>Director: Juanjo Salvador</a:t>
-            </a:r>
-          </a:p>
-          <a:p>
-            <a:pPr>
-              <a:defRPr sz="1800"/>
-            </a:pPr>
-            <a:r>
-              <a:t>Julio 2026</a:t>
-            </a:r>
-          </a:p>
-        </p:txBody>
-      </p:sp>
-    </p:spTree>
-  </p:cSld>
-  <p:clrMapOvr>
-    <a:masterClrMapping/>
-  </p:clrMapOvr>
-</p:sld>
-</file>
-
-<file path=ppt/slides/slide10.xml><?xml version="1.0" encoding="utf-8"?>
-<p:sld xmlns:a="http://schemas.openxmlformats.org/drawingml/2006/main" xmlns:p="http://schemas.openxmlformats.org/presentationml/2006/main" xmlns:r="http://schemas.openxmlformats.org/officeDocument/2006/relationships">
-  <p:cSld>
-    <p:spTree>
-      <p:nvGrpSpPr>
-        <p:cNvPr id="1" name=""/>
-        <p:cNvGrpSpPr/>
-        <p:nvPr/>
-      </p:nvGrpSpPr>
-      <p:grpSpPr/>
-      <p:sp>
-        <p:nvSpPr>
-          <p:cNvPr id="2" name="TextBox 1"/>
-          <p:cNvSpPr txBox="1"/>
-          <p:nvPr/>
-        </p:nvSpPr>
-        <p:spPr>
-          <a:xfrm>
-            <a:off x="457200" y="292608"/>
-            <a:ext cx="8229600" cy="685800"/>
-          </a:xfrm>
-          <a:prstGeom prst="rect">
-            <a:avLst/>
-          </a:prstGeom>
-          <a:noFill/>
-        </p:spPr>
-        <p:txBody>
-          <a:bodyPr wrap="none">
-            <a:spAutoFit/>
-          </a:bodyPr>
-          <a:lstStyle/>
-          <a:p>
-            <a:pPr>
-              <a:defRPr sz="2200" b="1"/>
-            </a:pPr>
-            <a:r>
-              <a:t>Conclusiones</a:t>
-            </a:r>
-          </a:p>
-        </p:txBody>
-      </p:sp>
-      <p:sp>
-        <p:nvSpPr>
-          <p:cNvPr id="3" name="TextBox 2"/>
-          <p:cNvSpPr txBox="1"/>
-          <p:nvPr/>
-        </p:nvSpPr>
-        <p:spPr>
-          <a:xfrm>
-            <a:off x="502920" y="1051560"/>
-            <a:ext cx="8046720" cy="5029200"/>
-          </a:xfrm>
-          <a:prstGeom prst="rect">
-            <a:avLst/>
-          </a:prstGeom>
-          <a:noFill/>
-        </p:spPr>
-        <p:txBody>
-          <a:bodyPr wrap="square">
-            <a:spAutoFit/>
-          </a:bodyPr>
-          <a:lstStyle/>
-          <a:p>
-            <a:pPr>
-              <a:spcAft>
-                <a:spcPts val="800"/>
-              </a:spcAft>
-              <a:defRPr sz="1500"/>
-            </a:pPr>
-            <a:r>
-              <a:t>• Híbrido viable sin fine-tuning ni cloud: reglas detectan, LLM tria FP</a:t>
-            </a:r>
-          </a:p>
-          <a:p>
-            <a:pPr>
-              <a:spcAft>
-                <a:spcPts val="800"/>
-              </a:spcAft>
-              <a:defRPr sz="1500"/>
-            </a:pPr>
-            <a:r>
-              <a:t>• H1 confirmada: 99 % de FP descartados en la muestra (umbral 30 %)</a:t>
-            </a:r>
-          </a:p>
-          <a:p>
-            <a:pPr>
-              <a:spcAft>
-                <a:spcPts val="800"/>
-              </a:spcAft>
-              <a:defRPr sz="1500"/>
-            </a:pPr>
-            <a:r>
-              <a:t>• La diferencia no es «añadir un LLM», es el prompt de contexto</a:t>
-            </a:r>
-          </a:p>
-          <a:p>
-            <a:pPr>
-              <a:spcAft>
-                <a:spcPts val="800"/>
-              </a:spcAft>
-              <a:defRPr sz="1500"/>
-            </a:pPr>
-            <a:r>
-              <a:t>• Pre-commit + CI con reglas; políticas de rotación y ocultación</a:t>
-            </a:r>
-          </a:p>
-        </p:txBody>
-      </p:sp>
-    </p:spTree>
-  </p:cSld>
-  <p:clrMapOvr>
-    <a:masterClrMapping/>
-  </p:clrMapOvr>
-</p:sld>
-</file>
-
-<file path=ppt/slides/slide11.xml><?xml version="1.0" encoding="utf-8"?>
-<p:sld xmlns:a="http://schemas.openxmlformats.org/drawingml/2006/main" xmlns:p="http://schemas.openxmlformats.org/presentationml/2006/main" xmlns:r="http://schemas.openxmlformats.org/officeDocument/2006/relationships">
-  <p:cSld>
-    <p:spTree>
-      <p:nvGrpSpPr>
-        <p:cNvPr id="1" name=""/>
-        <p:cNvGrpSpPr/>
-        <p:nvPr/>
-      </p:nvGrpSpPr>
-      <p:grpSpPr/>
-      <p:sp>
-        <p:nvSpPr>
-          <p:cNvPr id="2" name="TextBox 1"/>
-          <p:cNvSpPr txBox="1"/>
-          <p:nvPr/>
-        </p:nvSpPr>
-        <p:spPr>
-          <a:xfrm>
-            <a:off x="457200" y="292608"/>
-            <a:ext cx="8229600" cy="685800"/>
-          </a:xfrm>
-          <a:prstGeom prst="rect">
-            <a:avLst/>
-          </a:prstGeom>
-          <a:noFill/>
-        </p:spPr>
-        <p:txBody>
-          <a:bodyPr wrap="none">
-            <a:spAutoFit/>
-          </a:bodyPr>
-          <a:lstStyle/>
-          <a:p>
-            <a:pPr>
-              <a:defRPr sz="2200" b="1"/>
-            </a:pPr>
-            <a:r>
-              <a:t>¿Preguntas?</a:t>
-            </a:r>
-          </a:p>
-        </p:txBody>
-      </p:sp>
-      <p:sp>
-        <p:nvSpPr>
-          <p:cNvPr id="3" name="TextBox 2"/>
-          <p:cNvSpPr txBox="1"/>
-          <p:nvPr/>
-        </p:nvSpPr>
-        <p:spPr>
-          <a:xfrm>
-            <a:off x="502920" y="1051560"/>
-            <a:ext cx="8046720" cy="5029200"/>
-          </a:xfrm>
-          <a:prstGeom prst="rect">
-            <a:avLst/>
-          </a:prstGeom>
-          <a:noFill/>
-        </p:spPr>
-        <p:txBody>
-          <a:bodyPr wrap="square">
-            <a:spAutoFit/>
-          </a:bodyPr>
-          <a:lstStyle/>
-          <a:p>
-            <a:pPr>
-              <a:spcAft>
-                <a:spcPts val="800"/>
-              </a:spcAft>
-              <a:defRPr sz="1500"/>
-            </a:pPr>
-            <a:r>
-              <a:t>• Ángela Ramírez Barajas — Director: Juanjo Salvador</a:t>
-            </a:r>
-          </a:p>
-          <a:p>
-            <a:pPr>
-              <a:spcAft>
-                <a:spcPts val="800"/>
-              </a:spcAft>
-              <a:defRPr sz="1500"/>
-            </a:pPr>
-            <a:r>
-              <a:t>• 2ª Ed. Máster en IA Aplicada a la Ciberseguridad</a:t>
-            </a:r>
-          </a:p>
-          <a:p>
-            <a:pPr>
-              <a:spcAft>
-                <a:spcPts val="800"/>
-              </a:spcAft>
-              <a:defRPr sz="1500"/>
-            </a:pPr>
-            <a:r>
-              <a:t>• Universidad Católica de Murcia (UCAM)</a:t>
             </a:r>
           </a:p>
         </p:txBody>
@@ -3457,7 +3224,7 @@
               <a:defRPr sz="2200" b="1"/>
             </a:pPr>
             <a:r>
-              <a:t>El problema (y el enunciado)</a:t>
+              <a:t>1. Problema y motivación</a:t>
             </a:r>
           </a:p>
         </p:txBody>
@@ -3470,8 +3237,8 @@
         </p:nvSpPr>
         <p:spPr>
           <a:xfrm>
-            <a:off x="502920" y="1051560"/>
-            <a:ext cx="8046720" cy="5029200"/>
+            <a:off x="502920" y="1097280"/>
+            <a:ext cx="8046720" cy="4937760"/>
           </a:xfrm>
           <a:prstGeom prst="rect">
             <a:avLst/>
@@ -3486,34 +3253,34 @@
           <a:p>
             <a:pPr>
               <a:spcAft>
-                <a:spcPts val="800"/>
+                <a:spcPts val="1200"/>
               </a:spcAft>
-              <a:defRPr sz="1500"/>
+              <a:defRPr sz="1600"/>
             </a:pPr>
             <a:r>
-              <a:t>• Las reglas (regex + entropía) son rápidas e integrables en Git</a:t>
+              <a:t>• Las credenciales se filtran en repositorios Git</a:t>
             </a:r>
           </a:p>
           <a:p>
             <a:pPr>
               <a:spcAft>
-                <a:spcPts val="800"/>
+                <a:spcPts val="1200"/>
               </a:spcAft>
-              <a:defRPr sz="1500"/>
+              <a:defRPr sz="1600"/>
             </a:pPr>
             <a:r>
-              <a:t>• El coste es el ruido: un mock o un README dispara la misma alerta que un secreto real</a:t>
+              <a:t>• Los escáneres de reglas son rápidos, pero tratan igual un secreto real y un mock</a:t>
             </a:r>
           </a:p>
           <a:p>
             <a:pPr>
               <a:spcAft>
-                <a:spcPts val="800"/>
+                <a:spcPts val="1200"/>
               </a:spcAft>
-              <a:defRPr sz="1500"/>
+              <a:defRPr sz="1600"/>
             </a:pPr>
             <a:r>
-              <a:t>• Enunciado: reducir FP, integrar en pre-commit/CI, medir, rotar y ocultar</a:t>
+              <a:t>• El ruido (falsos positivos) hace que los equipos desactiven la herramienta</a:t>
             </a:r>
           </a:p>
         </p:txBody>
@@ -3562,7 +3329,7 @@
               <a:defRPr sz="2200" b="1"/>
             </a:pPr>
             <a:r>
-              <a:t>Cómo lo hago: dos capas</a:t>
+              <a:t>2. Estado del arte</a:t>
             </a:r>
           </a:p>
         </p:txBody>
@@ -3575,8 +3342,8 @@
         </p:nvSpPr>
         <p:spPr>
           <a:xfrm>
-            <a:off x="502920" y="1051560"/>
-            <a:ext cx="4206240" cy="5029200"/>
+            <a:off x="502920" y="1097280"/>
+            <a:ext cx="8046720" cy="4937760"/>
           </a:xfrm>
           <a:prstGeom prst="rect">
             <a:avLst/>
@@ -3591,73 +3358,49 @@
           <a:p>
             <a:pPr>
               <a:spcAft>
-                <a:spcPts val="800"/>
+                <a:spcPts val="1200"/>
               </a:spcAft>
-              <a:defRPr sz="1500"/>
+              <a:defRPr sz="1600"/>
             </a:pPr>
             <a:r>
-              <a:t>• Gitleaks detecta candidatos (única capa que encuentra secretos)</a:t>
+              <a:t>• Gitleaks: regex + entropía, integrable en Git; muchos FP</a:t>
             </a:r>
           </a:p>
           <a:p>
             <a:pPr>
               <a:spcAft>
-                <a:spcPts val="800"/>
+                <a:spcPts val="1200"/>
               </a:spcAft>
-              <a:defRPr sz="1500"/>
+              <a:defRPr sz="1600"/>
             </a:pPr>
             <a:r>
-              <a:t>• Cruce con CredData: TP (6.845) y FP (1.128)</a:t>
+              <a:t>• detect-secrets / TruffleHog: baseline manual o verificación en red</a:t>
             </a:r>
           </a:p>
           <a:p>
             <a:pPr>
               <a:spcAft>
-                <a:spcPts val="800"/>
+                <a:spcPts val="1200"/>
               </a:spcAft>
-              <a:defRPr sz="1500"/>
+              <a:defRPr sz="1600"/>
             </a:pPr>
             <a:r>
-              <a:t>• El LLM local (Llama 3.1 8B) solo ve FP: decide si descartar la alerta</a:t>
+              <a:t>• LLM con fine-tuning (Rahman et al.): F1 alto, requiere entrenamiento</a:t>
             </a:r>
           </a:p>
           <a:p>
             <a:pPr>
               <a:spcAft>
-                <a:spcPts val="800"/>
+                <a:spcPts val="1200"/>
               </a:spcAft>
-              <a:defRPr sz="1500"/>
+              <a:defRPr sz="1600"/>
             </a:pPr>
             <a:r>
-              <a:t>• Precisión híbrida = TP / (TP + FP que el filtro no descartó)</a:t>
-            </a:r>
-          </a:p>
-        </p:txBody>
-      </p:sp>
-      <p:pic>
-        <p:nvPicPr>
-          <p:cNvPr id="4" name="Picture 3" descr="fig01_pipeline_hibrido.png"/>
-          <p:cNvPicPr>
-            <a:picLocks noChangeAspect="1"/>
-          </p:cNvPicPr>
-          <p:nvPr/>
-        </p:nvPicPr>
-        <p:blipFill>
-          <a:blip r:embed="rId2"/>
-          <a:stretch>
-            <a:fillRect/>
-          </a:stretch>
-        </p:blipFill>
-        <p:spPr>
-          <a:xfrm>
-            <a:off x="4892040" y="1143000"/>
-            <a:ext cx="3840480" cy="969409"/>
-          </a:xfrm>
-          <a:prstGeom prst="rect">
-            <a:avLst/>
-          </a:prstGeom>
-        </p:spPr>
-      </p:pic>
+              <a:t>• Hueco: filtro local, sin LoRA, sobre un escáner ya desplegable</a:t>
+            </a:r>
+          </a:p>
+        </p:txBody>
+      </p:sp>
     </p:spTree>
   </p:cSld>
   <p:clrMapOvr>
@@ -3702,7 +3445,7 @@
               <a:defRPr sz="2200" b="1"/>
             </a:pPr>
             <a:r>
-              <a:t>Por qué solo evalúo falsos positivos</a:t>
+              <a:t>3. Solución propuesta</a:t>
             </a:r>
           </a:p>
         </p:txBody>
@@ -3715,8 +3458,8 @@
         </p:nvSpPr>
         <p:spPr>
           <a:xfrm>
-            <a:off x="502920" y="1051560"/>
-            <a:ext cx="8046720" cy="5029200"/>
+            <a:off x="502920" y="1097280"/>
+            <a:ext cx="4114800" cy="4937760"/>
           </a:xfrm>
           <a:prstGeom prst="rect">
             <a:avLst/>
@@ -3731,49 +3474,62 @@
           <a:p>
             <a:pPr>
               <a:spcAft>
-                <a:spcPts val="800"/>
+                <a:spcPts val="1200"/>
               </a:spcAft>
-              <a:defRPr sz="1500"/>
+              <a:defRPr sz="1600"/>
             </a:pPr>
             <a:r>
-              <a:t>• El LLM no es un detector: no busca secretos en el código</a:t>
+              <a:t>• Gitleaks detecta; Llama 3.1 8B (Ollama) solo tria falsos positivos</a:t>
             </a:r>
           </a:p>
           <a:p>
             <a:pPr>
               <a:spcAft>
-                <a:spcPts val="800"/>
+                <a:spcPts val="1200"/>
               </a:spcAft>
-              <a:defRPr sz="1500"/>
+              <a:defRPr sz="1600"/>
             </a:pPr>
             <a:r>
-              <a:t>• Si viera también TP, un error suyo bajaría el recall (silenciaría un secreto real)</a:t>
+              <a:t>• Los verdaderos positivos no se tocan: el recall de las reglas se conserva</a:t>
             </a:r>
           </a:p>
           <a:p>
             <a:pPr>
               <a:spcAft>
-                <a:spcPts val="800"/>
+                <a:spcPts val="1200"/>
               </a:spcAft>
-              <a:defRPr sz="1500"/>
+              <a:defRPr sz="1600"/>
             </a:pPr>
             <a:r>
-              <a:t>• El enunciado pide reducir ruido, no sustituir las reglas</a:t>
-            </a:r>
-          </a:p>
-          <a:p>
-            <a:pPr>
-              <a:spcAft>
-                <a:spcPts val="800"/>
-              </a:spcAft>
-              <a:defRPr sz="1500"/>
-            </a:pPr>
-            <a:r>
-              <a:t>• Por eso el recall del híbrido es exactamente el de Gitleaks: 45,86 %</a:t>
-            </a:r>
-          </a:p>
-        </p:txBody>
-      </p:sp>
+              <a:t>• Sin fine-tuning ni API cloud</a:t>
+            </a:r>
+          </a:p>
+        </p:txBody>
+      </p:sp>
+      <p:pic>
+        <p:nvPicPr>
+          <p:cNvPr id="4" name="Picture 3" descr="fig01_pipeline_hibrido.png"/>
+          <p:cNvPicPr>
+            <a:picLocks noChangeAspect="1"/>
+          </p:cNvPicPr>
+          <p:nvPr/>
+        </p:nvPicPr>
+        <p:blipFill>
+          <a:blip r:embed="rId2"/>
+          <a:stretch>
+            <a:fillRect/>
+          </a:stretch>
+        </p:blipFill>
+        <p:spPr>
+          <a:xfrm>
+            <a:off x="4754880" y="1188720"/>
+            <a:ext cx="4023360" cy="1015571"/>
+          </a:xfrm>
+          <a:prstGeom prst="rect">
+            <a:avLst/>
+          </a:prstGeom>
+        </p:spPr>
+      </p:pic>
     </p:spTree>
   </p:cSld>
   <p:clrMapOvr>
@@ -3818,7 +3574,7 @@
               <a:defRPr sz="2200" b="1"/>
             </a:pPr>
             <a:r>
-              <a:t>¿Mejora a otras propuestas?</a:t>
+              <a:t>4. Desarrollo y decisiones clave</a:t>
             </a:r>
           </a:p>
         </p:txBody>
@@ -3831,8 +3587,8 @@
         </p:nvSpPr>
         <p:spPr>
           <a:xfrm>
-            <a:off x="502920" y="1051560"/>
-            <a:ext cx="8046720" cy="5029200"/>
+            <a:off x="502920" y="1097280"/>
+            <a:ext cx="8046720" cy="4937760"/>
           </a:xfrm>
           <a:prstGeom prst="rect">
             <a:avLst/>
@@ -3847,45 +3603,45 @@
           <a:p>
             <a:pPr>
               <a:spcAft>
-                <a:spcPts val="800"/>
+                <a:spcPts val="1200"/>
               </a:spcAft>
-              <a:defRPr sz="1500"/>
+              <a:defRPr sz="1600"/>
             </a:pPr>
             <a:r>
-              <a:t>• Frente a reglas solas: sí. Precisión 85,85 % → 99,97 % proyectada; mismo recall</a:t>
+              <a:t>• Prompt genérico: el modelo se fía del formato (34 % de acierto)</a:t>
             </a:r>
           </a:p>
           <a:p>
             <a:pPr>
               <a:spcAft>
-                <a:spcPts val="800"/>
+                <a:spcPts val="1200"/>
               </a:spcAft>
-              <a:defRPr sz="1500"/>
+              <a:defRPr sz="1600"/>
             </a:pPr>
             <a:r>
-              <a:t>• Frente a Rahman et al. / Biringa (LLM o ML con entrenamiento): no reclamo mejor F1</a:t>
+              <a:t>• Prompt contextual (test/mock/docs): 99 %, cero regresiones</a:t>
             </a:r>
           </a:p>
           <a:p>
             <a:pPr>
               <a:spcAft>
-                <a:spcPts val="800"/>
+                <a:spcPts val="1200"/>
               </a:spcAft>
-              <a:defRPr sz="1500"/>
+              <a:defRPr sz="1600"/>
             </a:pPr>
             <a:r>
-              <a:t>• Ellos maximizan F1 global; yo filtro FP de Gitleaks sin fine-tuning</a:t>
+              <a:t>• El LLM no va en cada commit: 5–15 s por candidato</a:t>
             </a:r>
           </a:p>
           <a:p>
             <a:pPr>
               <a:spcAft>
-                <a:spcPts val="800"/>
+                <a:spcPts val="1200"/>
               </a:spcAft>
-              <a:defRPr sz="1500"/>
+              <a:defRPr sz="1600"/>
             </a:pPr>
             <a:r>
-              <a:t>• Aporte: operativo, local (Ollama), y el prompt contextual es lo que marca la diferencia</a:t>
+              <a:t>• Muestra de 200 FP: alcance realista frente a 1.128 totales</a:t>
             </a:r>
           </a:p>
         </p:txBody>
@@ -3934,7 +3690,7 @@
               <a:defRPr sz="2200" b="1"/>
             </a:pPr>
             <a:r>
-              <a:t>Baseline: solo Gitleaks</a:t>
+              <a:t>5. Resultados</a:t>
             </a:r>
           </a:p>
         </p:txBody>
@@ -3947,8 +3703,8 @@
         </p:nvSpPr>
         <p:spPr>
           <a:xfrm>
-            <a:off x="502920" y="1051560"/>
-            <a:ext cx="4206240" cy="5029200"/>
+            <a:off x="502920" y="1097280"/>
+            <a:ext cx="4114800" cy="4937760"/>
           </a:xfrm>
           <a:prstGeom prst="rect">
             <a:avLst/>
@@ -3963,52 +3719,52 @@
           <a:p>
             <a:pPr>
               <a:spcAft>
-                <a:spcPts val="800"/>
+                <a:spcPts val="1200"/>
               </a:spcAft>
-              <a:defRPr sz="1500"/>
+              <a:defRPr sz="1600"/>
             </a:pPr>
             <a:r>
-              <a:t>• CredData: ~1,02 GB en 56,8 s | 8.210 hallazgos</a:t>
+              <a:t>• Gitleaks: precisión 85,85 % | recall 45,86 %</a:t>
             </a:r>
           </a:p>
           <a:p>
             <a:pPr>
               <a:spcAft>
-                <a:spcPts val="800"/>
+                <a:spcPts val="1200"/>
               </a:spcAft>
-              <a:defRPr sz="1500"/>
+              <a:defRPr sz="1600"/>
             </a:pPr>
             <a:r>
-              <a:t>• TP 6.845 | FP 1.128 | FN 8.177</a:t>
+              <a:t>• Híbrido v2: 198/200 FP bien descartados</a:t>
             </a:r>
           </a:p>
           <a:p>
             <a:pPr>
               <a:spcAft>
-                <a:spcPts val="800"/>
+                <a:spcPts val="1200"/>
               </a:spcAft>
-              <a:defRPr sz="1500"/>
+              <a:defRPr sz="1600"/>
             </a:pPr>
             <a:r>
-              <a:t>• Precisión 85,85 % | Recall 45,86 % | F1 59,79 %</a:t>
+              <a:t>• Precisión proyectada 99,97 %; recall igual (el LLM no es un detector)</a:t>
             </a:r>
           </a:p>
           <a:p>
             <a:pPr>
               <a:spcAft>
-                <a:spcPts val="800"/>
+                <a:spcPts val="1200"/>
               </a:spcAft>
-              <a:defRPr sz="1500"/>
+              <a:defRPr sz="1600"/>
             </a:pPr>
             <a:r>
-              <a:t>• Útil para detectar; inviable de triar a mano en un hook diario</a:t>
+              <a:t>• Comparación justa: Gitleaks, no el F1 de papers con LoRA</a:t>
             </a:r>
           </a:p>
         </p:txBody>
       </p:sp>
       <p:pic>
         <p:nvPicPr>
-          <p:cNvPr id="4" name="Picture 3" descr="fig05_precision_recall.png"/>
+          <p:cNvPr id="4" name="Picture 3" descr="fig02_precision_comparativa.png"/>
           <p:cNvPicPr>
             <a:picLocks noChangeAspect="1"/>
           </p:cNvPicPr>
@@ -4022,8 +3778,8 @@
         </p:blipFill>
         <p:spPr>
           <a:xfrm>
-            <a:off x="4892040" y="1143000"/>
-            <a:ext cx="3840480" cy="3482893"/>
+            <a:off x="4754880" y="1188720"/>
+            <a:ext cx="4023360" cy="2559255"/>
           </a:xfrm>
           <a:prstGeom prst="rect">
             <a:avLst/>
@@ -4074,7 +3830,7 @@
               <a:defRPr sz="2200" b="1"/>
             </a:pPr>
             <a:r>
-              <a:t>El prompt es el resultado</a:t>
+              <a:t>6. Conclusiones y trabajo futuro</a:t>
             </a:r>
           </a:p>
         </p:txBody>
@@ -4087,8 +3843,8 @@
         </p:nvSpPr>
         <p:spPr>
           <a:xfrm>
-            <a:off x="502920" y="1051560"/>
-            <a:ext cx="4206240" cy="5029200"/>
+            <a:off x="502920" y="1097280"/>
+            <a:ext cx="8046720" cy="4937760"/>
           </a:xfrm>
           <a:prstGeom prst="rect">
             <a:avLst/>
@@ -4103,301 +3859,34 @@
           <a:p>
             <a:pPr>
               <a:spcAft>
-                <a:spcPts val="800"/>
+                <a:spcPts val="1200"/>
               </a:spcAft>
-              <a:defRPr sz="1500"/>
+              <a:defRPr sz="1600"/>
             </a:pPr>
             <a:r>
-              <a:t>• Mismo modelo, temperatura 0, mismos 200 FP</a:t>
+              <a:t>• El valor está en el prompt de contexto, no en «añadir un LLM»</a:t>
             </a:r>
           </a:p>
           <a:p>
             <a:pPr>
               <a:spcAft>
-                <a:spcPts val="800"/>
+                <a:spcPts val="1200"/>
               </a:spcAft>
-              <a:defRPr sz="1500"/>
+              <a:defRPr sz="1600"/>
             </a:pPr>
             <a:r>
-              <a:t>• v1 genérico («¿parece un secreto?»): 34 % de acierto</a:t>
+              <a:t>• Limitación: muestra parcial; el recall de las reglas no mejora</a:t>
             </a:r>
           </a:p>
           <a:p>
             <a:pPr>
               <a:spcAft>
-                <a:spcPts val="800"/>
+                <a:spcPts val="1200"/>
               </a:spcAft>
-              <a:defRPr sz="1500"/>
+              <a:defRPr sz="1600"/>
             </a:pPr>
             <a:r>
-              <a:t>• v2 contextual (rutas test/mock/docs + nombres MOCK): 99 %</a:t>
-            </a:r>
-          </a:p>
-          <a:p>
-            <a:pPr>
-              <a:spcAft>
-                <a:spcPts val="800"/>
-              </a:spcAft>
-              <a:defRPr sz="1500"/>
-            </a:pPr>
-            <a:r>
-              <a:t>• 130 correcciones, 0 regresiones, 1 caso residual (PEM en docs inline)</a:t>
-            </a:r>
-          </a:p>
-        </p:txBody>
-      </p:sp>
-      <p:pic>
-        <p:nvPicPr>
-          <p:cNvPr id="4" name="Picture 3" descr="fig02_precision_comparativa.png"/>
-          <p:cNvPicPr>
-            <a:picLocks noChangeAspect="1"/>
-          </p:cNvPicPr>
-          <p:nvPr/>
-        </p:nvPicPr>
-        <p:blipFill>
-          <a:blip r:embed="rId2"/>
-          <a:stretch>
-            <a:fillRect/>
-          </a:stretch>
-        </p:blipFill>
-        <p:spPr>
-          <a:xfrm>
-            <a:off x="4892040" y="1143000"/>
-            <a:ext cx="3840480" cy="2442925"/>
-          </a:xfrm>
-          <a:prstGeom prst="rect">
-            <a:avLst/>
-          </a:prstGeom>
-        </p:spPr>
-      </p:pic>
-    </p:spTree>
-  </p:cSld>
-  <p:clrMapOvr>
-    <a:masterClrMapping/>
-  </p:clrMapOvr>
-</p:sld>
-</file>
-
-<file path=ppt/slides/slide8.xml><?xml version="1.0" encoding="utf-8"?>
-<p:sld xmlns:a="http://schemas.openxmlformats.org/drawingml/2006/main" xmlns:p="http://schemas.openxmlformats.org/presentationml/2006/main" xmlns:r="http://schemas.openxmlformats.org/officeDocument/2006/relationships">
-  <p:cSld>
-    <p:spTree>
-      <p:nvGrpSpPr>
-        <p:cNvPr id="1" name=""/>
-        <p:cNvGrpSpPr/>
-        <p:nvPr/>
-      </p:nvGrpSpPr>
-      <p:grpSpPr/>
-      <p:sp>
-        <p:nvSpPr>
-          <p:cNvPr id="2" name="TextBox 1"/>
-          <p:cNvSpPr txBox="1"/>
-          <p:nvPr/>
-        </p:nvSpPr>
-        <p:spPr>
-          <a:xfrm>
-            <a:off x="457200" y="292608"/>
-            <a:ext cx="8229600" cy="685800"/>
-          </a:xfrm>
-          <a:prstGeom prst="rect">
-            <a:avLst/>
-          </a:prstGeom>
-          <a:noFill/>
-        </p:spPr>
-        <p:txBody>
-          <a:bodyPr wrap="none">
-            <a:spAutoFit/>
-          </a:bodyPr>
-          <a:lstStyle/>
-          <a:p>
-            <a:pPr>
-              <a:defRPr sz="2200" b="1"/>
-            </a:pPr>
-            <a:r>
-              <a:t>Cómo se opera</a:t>
-            </a:r>
-          </a:p>
-        </p:txBody>
-      </p:sp>
-      <p:sp>
-        <p:nvSpPr>
-          <p:cNvPr id="3" name="TextBox 2"/>
-          <p:cNvSpPr txBox="1"/>
-          <p:nvPr/>
-        </p:nvSpPr>
-        <p:spPr>
-          <a:xfrm>
-            <a:off x="502920" y="1051560"/>
-            <a:ext cx="8046720" cy="5029200"/>
-          </a:xfrm>
-          <a:prstGeom prst="rect">
-            <a:avLst/>
-          </a:prstGeom>
-          <a:noFill/>
-        </p:spPr>
-        <p:txBody>
-          <a:bodyPr wrap="square">
-            <a:spAutoFit/>
-          </a:bodyPr>
-          <a:lstStyle/>
-          <a:p>
-            <a:pPr>
-              <a:spcAft>
-                <a:spcPts val="800"/>
-              </a:spcAft>
-              <a:defRPr sz="1500"/>
-            </a:pPr>
-            <a:r>
-              <a:t>• Pre-commit y GitHub Actions: solo Gitleaks (bloqueo en &lt; 1 s)</a:t>
-            </a:r>
-          </a:p>
-          <a:p>
-            <a:pPr>
-              <a:spcAft>
-                <a:spcPts val="800"/>
-              </a:spcAft>
-              <a:defRPr sz="1500"/>
-            </a:pPr>
-            <a:r>
-              <a:t>• LLM en lote o runner con Ollama (~5–15 s/candidato)</a:t>
-            </a:r>
-          </a:p>
-          <a:p>
-            <a:pPr>
-              <a:spcAft>
-                <a:spcPts val="800"/>
-              </a:spcAft>
-              <a:defRPr sz="1500"/>
-            </a:pPr>
-            <a:r>
-              <a:t>• Secretos de pipeline: referencia a secrets del proveedor, nunca en el YAML</a:t>
-            </a:r>
-          </a:p>
-          <a:p>
-            <a:pPr>
-              <a:spcAft>
-                <a:spcPts val="800"/>
-              </a:spcAft>
-              <a:defRPr sz="1500"/>
-            </a:pPr>
-            <a:r>
-              <a:t>• Hallazgo real en main: rotar en &lt; 24 h; allowlist solo con justificación</a:t>
-            </a:r>
-          </a:p>
-        </p:txBody>
-      </p:sp>
-    </p:spTree>
-  </p:cSld>
-  <p:clrMapOvr>
-    <a:masterClrMapping/>
-  </p:clrMapOvr>
-</p:sld>
-</file>
-
-<file path=ppt/slides/slide9.xml><?xml version="1.0" encoding="utf-8"?>
-<p:sld xmlns:a="http://schemas.openxmlformats.org/drawingml/2006/main" xmlns:p="http://schemas.openxmlformats.org/presentationml/2006/main" xmlns:r="http://schemas.openxmlformats.org/officeDocument/2006/relationships">
-  <p:cSld>
-    <p:spTree>
-      <p:nvGrpSpPr>
-        <p:cNvPr id="1" name=""/>
-        <p:cNvGrpSpPr/>
-        <p:nvPr/>
-      </p:nvGrpSpPr>
-      <p:grpSpPr/>
-      <p:sp>
-        <p:nvSpPr>
-          <p:cNvPr id="2" name="TextBox 1"/>
-          <p:cNvSpPr txBox="1"/>
-          <p:nvPr/>
-        </p:nvSpPr>
-        <p:spPr>
-          <a:xfrm>
-            <a:off x="457200" y="292608"/>
-            <a:ext cx="8229600" cy="685800"/>
-          </a:xfrm>
-          <a:prstGeom prst="rect">
-            <a:avLst/>
-          </a:prstGeom>
-          <a:noFill/>
-        </p:spPr>
-        <p:txBody>
-          <a:bodyPr wrap="none">
-            <a:spAutoFit/>
-          </a:bodyPr>
-          <a:lstStyle/>
-          <a:p>
-            <a:pPr>
-              <a:defRPr sz="2200" b="1"/>
-            </a:pPr>
-            <a:r>
-              <a:t>Limitaciones</a:t>
-            </a:r>
-          </a:p>
-        </p:txBody>
-      </p:sp>
-      <p:sp>
-        <p:nvSpPr>
-          <p:cNvPr id="3" name="TextBox 2"/>
-          <p:cNvSpPr txBox="1"/>
-          <p:nvPr/>
-        </p:nvSpPr>
-        <p:spPr>
-          <a:xfrm>
-            <a:off x="502920" y="1051560"/>
-            <a:ext cx="8046720" cy="5029200"/>
-          </a:xfrm>
-          <a:prstGeom prst="rect">
-            <a:avLst/>
-          </a:prstGeom>
-          <a:noFill/>
-        </p:spPr>
-        <p:txBody>
-          <a:bodyPr wrap="square">
-            <a:spAutoFit/>
-          </a:bodyPr>
-          <a:lstStyle/>
-          <a:p>
-            <a:pPr>
-              <a:spcAft>
-                <a:spcPts val="800"/>
-              </a:spcAft>
-              <a:defRPr sz="1500"/>
-            </a:pPr>
-            <a:r>
-              <a:t>• Muestra: 200 de 1.128 FP (proyección 99,97 % = cota alta)</a:t>
-            </a:r>
-          </a:p>
-          <a:p>
-            <a:pPr>
-              <a:spcAft>
-                <a:spcPts val="800"/>
-              </a:spcAft>
-              <a:defRPr sz="1500"/>
-            </a:pPr>
-            <a:r>
-              <a:t>• El recall de las reglas no mejora: el LLM no ve los FN</a:t>
-            </a:r>
-          </a:p>
-          <a:p>
-            <a:pPr>
-              <a:spcAft>
-                <a:spcPts val="800"/>
-              </a:spcAft>
-              <a:defRPr sz="1500"/>
-            </a:pPr>
-            <a:r>
-              <a:t>• Un modelo local; sin verificar si la credencial está viva</a:t>
-            </a:r>
-          </a:p>
-          <a:p>
-            <a:pPr>
-              <a:spcAft>
-                <a:spcPts val="800"/>
-              </a:spcAft>
-              <a:defRPr sz="1500"/>
-            </a:pPr>
-            <a:r>
-              <a:t>• v2 puede estar alineado a patrones típicos de CredData</a:t>
+              <a:t>• Siguiente paso: más FP, documentación inline, latencia en CI</a:t>
             </a:r>
           </a:p>
         </p:txBody>
